--- a/system-design-101/vi/lessons/sd-02-006/slides/sd-02-006.pptx
+++ b/system-design-101/vi/lessons/sd-02-006/slides/sd-02-006.pptx
@@ -1710,17 +1710,17 @@
           <a:ln/>
         </p:spPr>
         <p:txBody>
-          <a:bodyPr wrap="square" lIns="0" tIns="64008" rIns="0" bIns="-64008" rtlCol="0" anchor="t"/>
+          <a:bodyPr wrap="square" lIns="0" tIns="72009" rIns="0" bIns="-72009" rtlCol="0" anchor="t"/>
           <a:lstStyle/>
           <a:p>
             <a:pPr algn="l" indent="0" marL="0">
               <a:lnSpc>
-                <a:spcPts val="7488"/>
+                <a:spcPts val="8424"/>
               </a:lnSpc>
               <a:buNone/>
             </a:pPr>
             <a:r>
-              <a:rPr lang="en-US" sz="7200" dirty="0" spc="-55" kern="0">
+              <a:rPr lang="en-US" sz="8100" dirty="0" spc="-62" kern="0">
                 <a:solidFill>
                   <a:srgbClr val="F3EEE3"/>
                 </a:solidFill>
@@ -1731,7 +1731,7 @@
               <a:t>Levels.fyi:</a:t>
             </a:r>
             <a:r>
-              <a:rPr lang="en-US" sz="7200" dirty="0" spc="-4" kern="0">
+              <a:rPr lang="en-US" sz="8100" dirty="0" spc="-4" kern="0">
                 <a:solidFill>
                   <a:srgbClr val="F3EEE3"/>
                 </a:solidFill>
@@ -1742,7 +1742,7 @@
               <a:t> bảng</a:t>
             </a:r>
             <a:r>
-              <a:rPr lang="en-US" sz="7200" dirty="0" spc="-3" kern="0">
+              <a:rPr lang="en-US" sz="8100" dirty="0" spc="0" kern="0">
                 <a:solidFill>
                   <a:srgbClr val="F3EEE3"/>
                 </a:solidFill>
@@ -1753,7 +1753,7 @@
               <a:t> tính</a:t>
             </a:r>
             <a:r>
-              <a:rPr lang="en-US" sz="7200" dirty="0" spc="0" kern="0">
+              <a:rPr lang="en-US" sz="8100" dirty="0" spc="-2" kern="0">
                 <a:solidFill>
                   <a:srgbClr val="F3EEE3"/>
                 </a:solidFill>
@@ -1764,7 +1764,7 @@
               <a:t> làm</a:t>
             </a:r>
             <a:r>
-              <a:rPr lang="en-US" sz="7200" dirty="0" spc="-17" kern="0">
+              <a:rPr lang="en-US" sz="8100" dirty="0" spc="-18" kern="0">
                 <a:solidFill>
                   <a:srgbClr val="F3EEE3"/>
                 </a:solidFill>
@@ -1774,7 +1774,7 @@
               </a:rPr>
               <a:t> backend</a:t>
             </a:r>
-            <a:endParaRPr lang="en-US" sz="7200" dirty="0"/>
+            <a:endParaRPr lang="en-US" sz="8100" dirty="0"/>
           </a:p>
         </p:txBody>
       </p:sp>

--- a/system-design-101/vi/lessons/sd-02-006/slides/sd-02-006.pptx
+++ b/system-design-101/vi/lessons/sd-02-006/slides/sd-02-006.pptx
@@ -2477,7 +2477,7 @@
               <a:buNone/>
             </a:pPr>
             <a:r>
-              <a:rPr lang="en-US" sz="1800" b="1" spc="227" kern="0" dirty="0">
+              <a:rPr lang="en-US" sz="1800" b="1" spc="228" kern="0" dirty="0">
                 <a:solidFill>
                   <a:srgbClr val="9AA0B5"/>
                 </a:solidFill>
@@ -2485,10 +2485,10 @@
                 <a:ea typeface="Be Vietnam Pro" pitchFamily="34" charset="-122"/>
                 <a:cs typeface="Be Vietnam Pro" pitchFamily="34" charset="-120"/>
               </a:rPr>
-              <a:t>ĐỌC</a:t>
-            </a:r>
-            <a:r>
-              <a:rPr lang="en-US" sz="1800" b="1" spc="179" kern="0" dirty="0">
+              <a:t>CÓ</a:t>
+            </a:r>
+            <a:r>
+              <a:rPr lang="en-US" sz="1800" b="1" spc="225" kern="0" dirty="0">
                 <a:solidFill>
                   <a:srgbClr val="9AA0B5"/>
                 </a:solidFill>
@@ -2496,10 +2496,10 @@
                 <a:ea typeface="Be Vietnam Pro" pitchFamily="34" charset="-122"/>
                 <a:cs typeface="Be Vietnam Pro" pitchFamily="34" charset="-120"/>
               </a:rPr>
-              <a:t> VÀ</a:t>
-            </a:r>
-            <a:r>
-              <a:rPr lang="en-US" sz="1800" b="1" spc="222" kern="0" dirty="0">
+              <a:t> DÙNG,</a:t>
+            </a:r>
+            <a:r>
+              <a:rPr lang="en-US" sz="1800" b="1" spc="226" kern="0" dirty="0">
                 <a:solidFill>
                   <a:srgbClr val="9AA0B5"/>
                 </a:solidFill>
@@ -2507,10 +2507,10 @@
                 <a:ea typeface="Be Vietnam Pro" pitchFamily="34" charset="-122"/>
                 <a:cs typeface="Be Vietnam Pro" pitchFamily="34" charset="-120"/>
               </a:rPr>
-              <a:t> TRẢ</a:t>
-            </a:r>
-            <a:r>
-              <a:rPr lang="en-US" sz="1800" b="1" spc="228" kern="0" dirty="0">
+              <a:t> NGUỒN KHÔNG</a:t>
+            </a:r>
+            <a:r>
+              <a:rPr lang="en-US" sz="1800" b="1" spc="164" kern="0" dirty="0">
                 <a:solidFill>
                   <a:srgbClr val="9AA0B5"/>
                 </a:solidFill>
@@ -2518,18 +2518,7 @@
                 <a:ea typeface="Be Vietnam Pro" pitchFamily="34" charset="-122"/>
                 <a:cs typeface="Be Vietnam Pro" pitchFamily="34" charset="-120"/>
               </a:rPr>
-              <a:t> DỮ</a:t>
-            </a:r>
-            <a:r>
-              <a:rPr lang="en-US" sz="1800" b="1" spc="224" kern="0" dirty="0">
-                <a:solidFill>
-                  <a:srgbClr val="9AA0B5"/>
-                </a:solidFill>
-                <a:latin typeface="Be Vietnam Pro" pitchFamily="34" charset="0"/>
-                <a:ea typeface="Be Vietnam Pro" pitchFamily="34" charset="-122"/>
-                <a:cs typeface="Be Vietnam Pro" pitchFamily="34" charset="-120"/>
-              </a:rPr>
-              <a:t> LIỆU</a:t>
+              <a:t> TẢ</a:t>
             </a:r>
             <a:endParaRPr lang="en-US" sz="1800" dirty="0"/>
           </a:p>
@@ -4373,7 +4362,7 @@
               <a:buNone/>
             </a:pPr>
             <a:r>
-              <a:rPr lang="en-US" sz="2400" dirty="0" spc="4" kern="0">
+              <a:rPr lang="en-US" sz="2400" dirty="0" spc="0" kern="0">
                 <a:solidFill>
                   <a:srgbClr val="14161C"/>
                 </a:solidFill>
@@ -4381,7 +4370,18 @@
                 <a:ea typeface="Be Vietnam Pro" pitchFamily="34" charset="-122"/>
                 <a:cs typeface="Be Vietnam Pro" pitchFamily="34" charset="-120"/>
               </a:rPr>
-              <a:t>Hàm</a:t>
+              <a:t>Có</a:t>
+            </a:r>
+            <a:r>
+              <a:rPr lang="en-US" sz="2400" dirty="0" spc="3" kern="0">
+                <a:solidFill>
+                  <a:srgbClr val="14161C"/>
+                </a:solidFill>
+                <a:latin typeface="Be Vietnam Pro" pitchFamily="34" charset="0"/>
+                <a:ea typeface="Be Vietnam Pro" pitchFamily="34" charset="-122"/>
+                <a:cs typeface="Be Vietnam Pro" pitchFamily="34" charset="-120"/>
+              </a:rPr>
+              <a:t> dùng;</a:t>
             </a:r>
             <a:r>
               <a:rPr lang="en-US" sz="2400" dirty="0" spc="1" kern="0">
@@ -4392,10 +4392,10 @@
                 <a:ea typeface="Be Vietnam Pro" pitchFamily="34" charset="-122"/>
                 <a:cs typeface="Be Vietnam Pro" pitchFamily="34" charset="-120"/>
               </a:rPr>
-              <a:t> nhỏ</a:t>
-            </a:r>
-            <a:r>
-              <a:rPr lang="en-US" sz="2400" dirty="0" spc="-18" kern="0">
+              <a:t> nguồn không</a:t>
+            </a:r>
+            <a:r>
+              <a:rPr lang="en-US" sz="2400" dirty="0" spc="0" kern="0">
                 <a:solidFill>
                   <a:srgbClr val="14161C"/>
                 </a:solidFill>
@@ -4403,10 +4403,10 @@
                 <a:ea typeface="Be Vietnam Pro" pitchFamily="34" charset="-122"/>
                 <a:cs typeface="Be Vietnam Pro" pitchFamily="34" charset="-120"/>
               </a:rPr>
-              <a:t> trên</a:t>
-            </a:r>
-            <a:r>
-              <a:rPr lang="en-US" sz="2400" dirty="0" spc="2" kern="0">
+              <a:t> nói</a:t>
+            </a:r>
+            <a:r>
+              <a:rPr lang="en-US" sz="2400" dirty="0" spc="3" kern="0">
                 <a:solidFill>
                   <a:srgbClr val="14161C"/>
                 </a:solidFill>
@@ -4414,10 +4414,10 @@
                 <a:ea typeface="Be Vietnam Pro" pitchFamily="34" charset="-122"/>
                 <a:cs typeface="Be Vietnam Pro" pitchFamily="34" charset="-120"/>
               </a:rPr>
-              <a:t> hạ</a:t>
-            </a:r>
-            <a:r>
-              <a:rPr lang="en-US" sz="2400" dirty="0" spc="-7" kern="0">
+              <a:t> hàm làm</a:t>
+            </a:r>
+            <a:r>
+              <a:rPr lang="en-US" sz="2400" dirty="0" spc="1" kern="0">
                 <a:solidFill>
                   <a:srgbClr val="14161C"/>
                 </a:solidFill>
@@ -4425,84 +4425,7 @@
                 <a:ea typeface="Be Vietnam Pro" pitchFamily="34" charset="-122"/>
                 <a:cs typeface="Be Vietnam Pro" pitchFamily="34" charset="-120"/>
               </a:rPr>
-              <a:t> tầng</a:t>
-            </a:r>
-            <a:r>
-              <a:rPr lang="en-US" sz="2400" dirty="0" spc="2" kern="0">
-                <a:solidFill>
-                  <a:srgbClr val="14161C"/>
-                </a:solidFill>
-                <a:latin typeface="Be Vietnam Pro" pitchFamily="34" charset="0"/>
-                <a:ea typeface="Be Vietnam Pro" pitchFamily="34" charset="-122"/>
-                <a:cs typeface="Be Vietnam Pro" pitchFamily="34" charset="-120"/>
-              </a:rPr>
-              <a:t> nhà</a:t>
-            </a:r>
-            <a:r>
-              <a:rPr lang="en-US" sz="2400" dirty="0" spc="0" kern="0">
-                <a:solidFill>
-                  <a:srgbClr val="14161C"/>
-                </a:solidFill>
-                <a:latin typeface="Be Vietnam Pro" pitchFamily="34" charset="0"/>
-                <a:ea typeface="Be Vietnam Pro" pitchFamily="34" charset="-122"/>
-                <a:cs typeface="Be Vietnam Pro" pitchFamily="34" charset="-120"/>
-              </a:rPr>
-              <a:t> cung</a:t>
-            </a:r>
-            <a:r>
-              <a:rPr lang="en-US" sz="2400" dirty="0" spc="2" kern="0">
-                <a:solidFill>
-                  <a:srgbClr val="14161C"/>
-                </a:solidFill>
-                <a:latin typeface="Be Vietnam Pro" pitchFamily="34" charset="0"/>
-                <a:ea typeface="Be Vietnam Pro" pitchFamily="34" charset="-122"/>
-                <a:cs typeface="Be Vietnam Pro" pitchFamily="34" charset="-120"/>
-              </a:rPr>
-              <a:t> cấp,</a:t>
-            </a:r>
-            <a:r>
-              <a:rPr lang="en-US" sz="2400" dirty="0" spc="0" kern="0">
-                <a:solidFill>
-                  <a:srgbClr val="14161C"/>
-                </a:solidFill>
-                <a:latin typeface="Be Vietnam Pro" pitchFamily="34" charset="0"/>
-                <a:ea typeface="Be Vietnam Pro" pitchFamily="34" charset="-122"/>
-                <a:cs typeface="Be Vietnam Pro" pitchFamily="34" charset="-120"/>
-              </a:rPr>
-              <a:t> không</a:t>
-            </a:r>
-            <a:r>
-              <a:rPr lang="en-US" sz="2400" dirty="0" spc="4" kern="0">
-                <a:solidFill>
-                  <a:srgbClr val="14161C"/>
-                </a:solidFill>
-                <a:latin typeface="Be Vietnam Pro" pitchFamily="34" charset="0"/>
-                <a:ea typeface="Be Vietnam Pro" pitchFamily="34" charset="-122"/>
-                <a:cs typeface="Be Vietnam Pro" pitchFamily="34" charset="-120"/>
-              </a:rPr>
-              <a:t> tự</a:t>
-            </a:r>
-            <a:r>
-              <a:rPr lang="en-US" sz="2400" dirty="0" spc="1" kern="0">
-                <a:solidFill>
-                  <a:srgbClr val="14161C"/>
-                </a:solidFill>
-                <a:latin typeface="Be Vietnam Pro" pitchFamily="34" charset="0"/>
-                <a:ea typeface="Be Vietnam Pro" pitchFamily="34" charset="-122"/>
-                <a:cs typeface="Be Vietnam Pro" pitchFamily="34" charset="-120"/>
-              </a:rPr>
-              <a:t> quản</a:t>
-            </a:r>
-            <a:r>
-              <a:rPr lang="en-US" sz="2400" dirty="0" spc="-5" kern="0">
-                <a:solidFill>
-                  <a:srgbClr val="14161C"/>
-                </a:solidFill>
-                <a:latin typeface="Be Vietnam Pro" pitchFamily="34" charset="0"/>
-                <a:ea typeface="Be Vietnam Pro" pitchFamily="34" charset="-122"/>
-                <a:cs typeface="Be Vietnam Pro" pitchFamily="34" charset="-120"/>
-              </a:rPr>
-              <a:t> máy.</a:t>
+              <a:t> gì.</a:t>
             </a:r>
             <a:endParaRPr lang="en-US" sz="2400" dirty="0"/>
           </a:p>

--- a/system-design-101/vi/lessons/sd-02-006/slides/sd-02-006.pptx
+++ b/system-design-101/vi/lessons/sd-02-006/slides/sd-02-006.pptx
@@ -3744,10 +3744,10 @@
                 <a:ea typeface="Bricolage Grotesque ExtraBold" pitchFamily="34" charset="-122"/>
                 <a:cs typeface="Bricolage Grotesque ExtraBold" pitchFamily="34" charset="-120"/>
               </a:rPr>
-              <a:t> mảnh, không</a:t>
-            </a:r>
-            <a:r>
-              <a:rPr lang="en-US" sz="6900" dirty="0" spc="-1" kern="0">
+              <a:t> mảnh,</a:t>
+            </a:r>
+            <a:r>
+              <a:rPr lang="en-US" sz="6900" dirty="0" spc="-48" kern="0">
                 <a:solidFill>
                   <a:srgbClr val="14161C"/>
                 </a:solidFill>
@@ -3755,10 +3755,10 @@
                 <a:ea typeface="Bricolage Grotesque ExtraBold" pitchFamily="34" charset="-122"/>
                 <a:cs typeface="Bricolage Grotesque ExtraBold" pitchFamily="34" charset="-120"/>
               </a:rPr>
-              <a:t> có máy</a:t>
-            </a:r>
-            <a:r>
-              <a:rPr lang="en-US" sz="6900" dirty="0" spc="1" kern="0">
+              <a:t> chưa</a:t>
+            </a:r>
+            <a:r>
+              <a:rPr lang="en-US" sz="6900" dirty="0" spc="-1" kern="0">
                 <a:solidFill>
                   <a:srgbClr val="14161C"/>
                 </a:solidFill>
@@ -3766,10 +3766,21 @@
                 <a:ea typeface="Bricolage Grotesque ExtraBold" pitchFamily="34" charset="-122"/>
                 <a:cs typeface="Bricolage Grotesque ExtraBold" pitchFamily="34" charset="-120"/>
               </a:rPr>
-              <a:t> chủ</a:t>
-            </a:r>
-            <a:r>
-              <a:rPr lang="en-US" sz="6900" dirty="0" spc="4" kern="0">
+              <a:t> có</a:t>
+            </a:r>
+            <a:r>
+              <a:rPr lang="en-US" sz="6900" dirty="0" spc="-16" kern="0">
+                <a:solidFill>
+                  <a:srgbClr val="14161C"/>
+                </a:solidFill>
+                <a:latin typeface="Bricolage Grotesque ExtraBold" pitchFamily="34" charset="0"/>
+                <a:ea typeface="Bricolage Grotesque ExtraBold" pitchFamily="34" charset="-122"/>
+                <a:cs typeface="Bricolage Grotesque ExtraBold" pitchFamily="34" charset="-120"/>
+              </a:rPr>
+              <a:t> backend</a:t>
+            </a:r>
+            <a:r>
+              <a:rPr lang="en-US" sz="6900" dirty="0" spc="3" kern="0">
                 <a:solidFill>
                   <a:srgbClr val="14161C"/>
                 </a:solidFill>
@@ -6605,7 +6616,7 @@
               <a:buNone/>
             </a:pPr>
             <a:r>
-              <a:rPr lang="en-US" sz="3300" dirty="0" spc="-5" kern="0">
+              <a:rPr lang="en-US" sz="3300" dirty="0" spc="-39" kern="0">
                 <a:solidFill>
                   <a:srgbClr val="14161C"/>
                 </a:solidFill>
@@ -6613,10 +6624,10 @@
                 <a:ea typeface="Bricolage Grotesque ExtraBold" pitchFamily="34" charset="-122"/>
                 <a:cs typeface="Bricolage Grotesque ExtraBold" pitchFamily="34" charset="-120"/>
               </a:rPr>
-              <a:t>Ai</a:t>
-            </a:r>
-            <a:r>
-              <a:rPr lang="en-US" sz="3300" dirty="0" spc="1" kern="0">
+              <a:t>Người</a:t>
+            </a:r>
+            <a:r>
+              <a:rPr lang="en-US" sz="3300" dirty="0" spc="0" kern="0">
                 <a:solidFill>
                   <a:srgbClr val="14161C"/>
                 </a:solidFill>
@@ -6624,10 +6635,10 @@
                 <a:ea typeface="Bricolage Grotesque ExtraBold" pitchFamily="34" charset="-122"/>
                 <a:cs typeface="Bricolage Grotesque ExtraBold" pitchFamily="34" charset="-120"/>
               </a:rPr>
-              <a:t> cũng</a:t>
-            </a:r>
-            <a:r>
-              <a:rPr lang="en-US" sz="3300" dirty="0" spc="-39" kern="0">
+              <a:t> không</a:t>
+            </a:r>
+            <a:r>
+              <a:rPr lang="en-US" sz="3300" dirty="0" spc="-2" kern="0">
                 <a:solidFill>
                   <a:srgbClr val="14161C"/>
                 </a:solidFill>
@@ -6635,10 +6646,10 @@
                 <a:ea typeface="Bricolage Grotesque ExtraBold" pitchFamily="34" charset="-122"/>
                 <a:cs typeface="Bricolage Grotesque ExtraBold" pitchFamily="34" charset="-120"/>
               </a:rPr>
-              <a:t> xem</a:t>
-            </a:r>
-            <a:r>
-              <a:rPr lang="en-US" sz="3300" dirty="0" spc="-36" kern="0">
+              <a:t> viết</a:t>
+            </a:r>
+            <a:r>
+              <a:rPr lang="en-US" sz="3300" dirty="0" spc="-1" kern="0">
                 <a:solidFill>
                   <a:srgbClr val="14161C"/>
                 </a:solidFill>
@@ -6646,10 +6657,10 @@
                 <a:ea typeface="Bricolage Grotesque ExtraBold" pitchFamily="34" charset="-122"/>
                 <a:cs typeface="Bricolage Grotesque ExtraBold" pitchFamily="34" charset="-120"/>
               </a:rPr>
-              <a:t> và</a:t>
-            </a:r>
-            <a:r>
-              <a:rPr lang="en-US" sz="3300" dirty="0" spc="-27" kern="0">
+              <a:t> mã</a:t>
+            </a:r>
+            <a:r>
+              <a:rPr lang="en-US" sz="3300" dirty="0" spc="1" kern="0">
                 <a:solidFill>
                   <a:srgbClr val="14161C"/>
                 </a:solidFill>
@@ -6657,10 +6668,21 @@
                 <a:ea typeface="Bricolage Grotesque ExtraBold" pitchFamily="34" charset="-122"/>
                 <a:cs typeface="Bricolage Grotesque ExtraBold" pitchFamily="34" charset="-120"/>
               </a:rPr>
+              <a:t> cũng</a:t>
+            </a:r>
+            <a:r>
+              <a:rPr lang="en-US" sz="3300" dirty="0" spc="-28" kern="0">
+                <a:solidFill>
+                  <a:srgbClr val="14161C"/>
+                </a:solidFill>
+                <a:latin typeface="Bricolage Grotesque ExtraBold" pitchFamily="34" charset="0"/>
+                <a:ea typeface="Bricolage Grotesque ExtraBold" pitchFamily="34" charset="-122"/>
+                <a:cs typeface="Bricolage Grotesque ExtraBold" pitchFamily="34" charset="-120"/>
+              </a:rPr>
               <a:t> sửa</a:t>
             </a:r>
             <a:r>
-              <a:rPr lang="en-US" sz="3300" dirty="0" spc="-44" kern="0">
+              <a:rPr lang="en-US" sz="3300" dirty="0" spc="-43" kern="0">
                 <a:solidFill>
                   <a:srgbClr val="14161C"/>
                 </a:solidFill>
@@ -6702,7 +6724,7 @@
               <a:buNone/>
             </a:pPr>
             <a:r>
-              <a:rPr lang="en-US" sz="2250" dirty="0" spc="-57" kern="0">
+              <a:rPr lang="en-US" sz="2250" dirty="0" spc="-34" kern="0">
                 <a:solidFill>
                   <a:srgbClr val="6B6A66"/>
                 </a:solidFill>
@@ -6710,10 +6732,10 @@
                 <a:ea typeface="Be Vietnam Pro" pitchFamily="34" charset="-122"/>
                 <a:cs typeface="Be Vietnam Pro" pitchFamily="34" charset="-120"/>
               </a:rPr>
-              <a:t>Kể</a:t>
-            </a:r>
-            <a:r>
-              <a:rPr lang="en-US" sz="2250" dirty="0" spc="1" kern="0">
+              <a:t>Xem</a:t>
+            </a:r>
+            <a:r>
+              <a:rPr lang="en-US" sz="2250" dirty="0" spc="-16" kern="0">
                 <a:solidFill>
                   <a:srgbClr val="6B6A66"/>
                 </a:solidFill>
@@ -6721,7 +6743,29 @@
                 <a:ea typeface="Be Vietnam Pro" pitchFamily="34" charset="-122"/>
                 <a:cs typeface="Be Vietnam Pro" pitchFamily="34" charset="-120"/>
               </a:rPr>
-              <a:t> cả</a:t>
+              <a:t> và</a:t>
+            </a:r>
+            <a:r>
+              <a:rPr lang="en-US" sz="2250" dirty="0" spc="11" kern="0">
+                <a:solidFill>
+                  <a:srgbClr val="6B6A66"/>
+                </a:solidFill>
+                <a:latin typeface="Be Vietnam Pro" pitchFamily="34" charset="0"/>
+                <a:ea typeface="Be Vietnam Pro" pitchFamily="34" charset="-122"/>
+                <a:cs typeface="Be Vietnam Pro" pitchFamily="34" charset="-120"/>
+              </a:rPr>
+              <a:t> sửa</a:t>
+            </a:r>
+            <a:r>
+              <a:rPr lang="en-US" sz="2250" dirty="0" spc="9" kern="0">
+                <a:solidFill>
+                  <a:srgbClr val="6B6A66"/>
+                </a:solidFill>
+                <a:latin typeface="Be Vietnam Pro" pitchFamily="34" charset="0"/>
+                <a:ea typeface="Be Vietnam Pro" pitchFamily="34" charset="-122"/>
+                <a:cs typeface="Be Vietnam Pro" pitchFamily="34" charset="-120"/>
+              </a:rPr>
+              <a:t> được</a:t>
             </a:r>
             <a:r>
               <a:rPr lang="en-US" sz="2250" dirty="0" spc="5" kern="0">
@@ -6732,10 +6776,10 @@
                 <a:ea typeface="Be Vietnam Pro" pitchFamily="34" charset="-122"/>
                 <a:cs typeface="Be Vietnam Pro" pitchFamily="34" charset="-120"/>
               </a:rPr>
-              <a:t> người</a:t>
-            </a:r>
-            <a:r>
-              <a:rPr lang="en-US" sz="2250" dirty="0" spc="1" kern="0">
+              <a:t> dữ</a:t>
+            </a:r>
+            <a:r>
+              <a:rPr lang="en-US" sz="2250" dirty="0" spc="-1" kern="0">
                 <a:solidFill>
                   <a:srgbClr val="6B6A66"/>
                 </a:solidFill>
@@ -6743,29 +6787,7 @@
                 <a:ea typeface="Be Vietnam Pro" pitchFamily="34" charset="-122"/>
                 <a:cs typeface="Be Vietnam Pro" pitchFamily="34" charset="-120"/>
               </a:rPr>
-              <a:t> không</a:t>
-            </a:r>
-            <a:r>
-              <a:rPr lang="en-US" sz="2250" dirty="0" spc="-6" kern="0">
-                <a:solidFill>
-                  <a:srgbClr val="6B6A66"/>
-                </a:solidFill>
-                <a:latin typeface="Be Vietnam Pro" pitchFamily="34" charset="0"/>
-                <a:ea typeface="Be Vietnam Pro" pitchFamily="34" charset="-122"/>
-                <a:cs typeface="Be Vietnam Pro" pitchFamily="34" charset="-120"/>
-              </a:rPr>
-              <a:t> viết</a:t>
-            </a:r>
-            <a:r>
-              <a:rPr lang="en-US" sz="2250" dirty="0" spc="0" kern="0">
-                <a:solidFill>
-                  <a:srgbClr val="6B6A66"/>
-                </a:solidFill>
-                <a:latin typeface="Be Vietnam Pro" pitchFamily="34" charset="0"/>
-                <a:ea typeface="Be Vietnam Pro" pitchFamily="34" charset="-122"/>
-                <a:cs typeface="Be Vietnam Pro" pitchFamily="34" charset="-120"/>
-              </a:rPr>
-              <a:t> mã.</a:t>
+              <a:t> liệu.</a:t>
             </a:r>
             <a:endParaRPr lang="en-US" sz="2250" dirty="0"/>
           </a:p>
